--- a/Reporte 050626.pptx
+++ b/Reporte 050626.pptx
@@ -5,7 +5,7 @@
     <p:sldMasterId id="2147483672" r:id="rId1"/>
   </p:sldMasterIdLst>
   <p:notesMasterIdLst>
-    <p:notesMasterId r:id="rId14"/>
+    <p:notesMasterId r:id="rId18"/>
   </p:notesMasterIdLst>
   <p:sldIdLst>
     <p:sldId id="350" r:id="rId2"/>
@@ -13,29 +13,33 @@
     <p:sldId id="352" r:id="rId4"/>
     <p:sldId id="393" r:id="rId5"/>
     <p:sldId id="378" r:id="rId6"/>
-    <p:sldId id="388" r:id="rId7"/>
-    <p:sldId id="351" r:id="rId8"/>
-    <p:sldId id="369" r:id="rId9"/>
-    <p:sldId id="361" r:id="rId10"/>
-    <p:sldId id="371" r:id="rId11"/>
-    <p:sldId id="384" r:id="rId12"/>
-    <p:sldId id="280" r:id="rId13"/>
+    <p:sldId id="394" r:id="rId7"/>
+    <p:sldId id="395" r:id="rId8"/>
+    <p:sldId id="396" r:id="rId9"/>
+    <p:sldId id="398" r:id="rId10"/>
+    <p:sldId id="388" r:id="rId11"/>
+    <p:sldId id="351" r:id="rId12"/>
+    <p:sldId id="369" r:id="rId13"/>
+    <p:sldId id="361" r:id="rId14"/>
+    <p:sldId id="371" r:id="rId15"/>
+    <p:sldId id="384" r:id="rId16"/>
+    <p:sldId id="280" r:id="rId17"/>
   </p:sldIdLst>
   <p:sldSz cx="9144000" cy="5143500" type="screen16x9"/>
   <p:notesSz cx="6858000" cy="9144000"/>
   <p:embeddedFontLst>
     <p:embeddedFont>
       <p:font typeface="Montserrat" panose="00000500000000000000" pitchFamily="2" charset="0"/>
-      <p:regular r:id="rId15"/>
-      <p:bold r:id="rId16"/>
-      <p:italic r:id="rId17"/>
-      <p:boldItalic r:id="rId18"/>
+      <p:regular r:id="rId19"/>
+      <p:bold r:id="rId20"/>
+      <p:italic r:id="rId21"/>
+      <p:boldItalic r:id="rId22"/>
     </p:embeddedFont>
     <p:embeddedFont>
       <p:font typeface="Montserrat Black" panose="00000A00000000000000" pitchFamily="2" charset="0"/>
-      <p:bold r:id="rId19"/>
-      <p:italic r:id="rId20"/>
-      <p:boldItalic r:id="rId21"/>
+      <p:bold r:id="rId23"/>
+      <p:italic r:id="rId24"/>
+      <p:boldItalic r:id="rId25"/>
     </p:embeddedFont>
   </p:embeddedFontLst>
   <p:defaultTextStyle>
@@ -6154,7 +6158,7 @@
                   <a:srgbClr val="D8AB72"/>
                 </a:solidFill>
               </a:rPr>
-              <a:t>04 de junio</a:t>
+              <a:t>05 de junio</a:t>
             </a:r>
           </a:p>
           <a:p>
@@ -6210,6 +6214,410 @@
 </file>
 
 <file path=ppt/slides/slide10.xml><?xml version="1.0" encoding="utf-8"?>
+<p:sld xmlns:a="http://schemas.openxmlformats.org/drawingml/2006/main" xmlns:r="http://schemas.openxmlformats.org/officeDocument/2006/relationships" xmlns:p="http://schemas.openxmlformats.org/presentationml/2006/main">
+  <p:cSld>
+    <p:spTree>
+      <p:nvGrpSpPr>
+        <p:cNvPr id="1" name="Shape 108">
+          <a:extLst>
+            <a:ext uri="{FF2B5EF4-FFF2-40B4-BE49-F238E27FC236}">
+              <a16:creationId xmlns:a16="http://schemas.microsoft.com/office/drawing/2014/main" id="{3AB59246-6522-404E-9FEB-F1E85E07D6CC}"/>
+            </a:ext>
+          </a:extLst>
+        </p:cNvPr>
+        <p:cNvGrpSpPr/>
+        <p:nvPr/>
+      </p:nvGrpSpPr>
+      <p:grpSpPr>
+        <a:xfrm>
+          <a:off x="0" y="0"/>
+          <a:ext cx="0" cy="0"/>
+          <a:chOff x="0" y="0"/>
+          <a:chExt cx="0" cy="0"/>
+        </a:xfrm>
+      </p:grpSpPr>
+      <p:sp>
+        <p:nvSpPr>
+          <p:cNvPr id="2" name="CuadroTexto 1">
+            <a:extLst>
+              <a:ext uri="{FF2B5EF4-FFF2-40B4-BE49-F238E27FC236}">
+                <a16:creationId xmlns:a16="http://schemas.microsoft.com/office/drawing/2014/main" id="{AE07F171-51E8-E8F4-27C7-0CA3B7A8A997}"/>
+              </a:ext>
+            </a:extLst>
+          </p:cNvPr>
+          <p:cNvSpPr txBox="1"/>
+          <p:nvPr/>
+        </p:nvSpPr>
+        <p:spPr>
+          <a:xfrm>
+            <a:off x="1183340" y="0"/>
+            <a:ext cx="6763871" cy="369332"/>
+          </a:xfrm>
+          <a:prstGeom prst="rect">
+            <a:avLst/>
+          </a:prstGeom>
+          <a:noFill/>
+        </p:spPr>
+        <p:txBody>
+          <a:bodyPr wrap="square" rtlCol="0">
+            <a:spAutoFit/>
+          </a:bodyPr>
+          <a:lstStyle/>
+          <a:p>
+            <a:pPr algn="ctr"/>
+            <a:r>
+              <a:rPr lang="es-MX" sz="1800" b="1" dirty="0">
+                <a:latin typeface="Montserrat" panose="00000500000000000000" pitchFamily="2" charset="0"/>
+              </a:rPr>
+              <a:t>Información de gobierno en radiodifusoras</a:t>
+            </a:r>
+          </a:p>
+        </p:txBody>
+      </p:sp>
+      <p:pic>
+        <p:nvPicPr>
+          <p:cNvPr id="5" name="Imagen 4">
+            <a:extLst>
+              <a:ext uri="{FF2B5EF4-FFF2-40B4-BE49-F238E27FC236}">
+                <a16:creationId xmlns:a16="http://schemas.microsoft.com/office/drawing/2014/main" id="{749E3C79-1B2E-F4FB-741E-8FF2B8A10A6F}"/>
+              </a:ext>
+            </a:extLst>
+          </p:cNvPr>
+          <p:cNvPicPr>
+            <a:picLocks noChangeAspect="1"/>
+          </p:cNvPicPr>
+          <p:nvPr/>
+        </p:nvPicPr>
+        <p:blipFill>
+          <a:blip r:embed="rId3"/>
+          <a:stretch>
+            <a:fillRect/>
+          </a:stretch>
+        </p:blipFill>
+        <p:spPr>
+          <a:xfrm>
+            <a:off x="0" y="878910"/>
+            <a:ext cx="9144000" cy="3528556"/>
+          </a:xfrm>
+          <a:prstGeom prst="rect">
+            <a:avLst/>
+          </a:prstGeom>
+        </p:spPr>
+      </p:pic>
+    </p:spTree>
+    <p:extLst>
+      <p:ext uri="{BB962C8B-B14F-4D97-AF65-F5344CB8AC3E}">
+        <p14:creationId xmlns:p14="http://schemas.microsoft.com/office/powerpoint/2010/main" val="3295811942"/>
+      </p:ext>
+    </p:extLst>
+  </p:cSld>
+  <p:clrMapOvr>
+    <a:masterClrMapping/>
+  </p:clrMapOvr>
+</p:sld>
+</file>
+
+<file path=ppt/slides/slide11.xml><?xml version="1.0" encoding="utf-8"?>
+<p:sld xmlns:a="http://schemas.openxmlformats.org/drawingml/2006/main" xmlns:r="http://schemas.openxmlformats.org/officeDocument/2006/relationships" xmlns:p="http://schemas.openxmlformats.org/presentationml/2006/main">
+  <p:cSld>
+    <p:spTree>
+      <p:nvGrpSpPr>
+        <p:cNvPr id="1" name=""/>
+        <p:cNvGrpSpPr/>
+        <p:nvPr/>
+      </p:nvGrpSpPr>
+      <p:grpSpPr>
+        <a:xfrm>
+          <a:off x="0" y="0"/>
+          <a:ext cx="0" cy="0"/>
+          <a:chOff x="0" y="0"/>
+          <a:chExt cx="0" cy="0"/>
+        </a:xfrm>
+      </p:grpSpPr>
+      <p:sp>
+        <p:nvSpPr>
+          <p:cNvPr id="5" name="CuadroTexto 4">
+            <a:extLst>
+              <a:ext uri="{FF2B5EF4-FFF2-40B4-BE49-F238E27FC236}">
+                <a16:creationId xmlns:a16="http://schemas.microsoft.com/office/drawing/2014/main" id="{1430F0AF-D0FD-1C68-F7C4-D9E93764E31F}"/>
+              </a:ext>
+            </a:extLst>
+          </p:cNvPr>
+          <p:cNvSpPr txBox="1"/>
+          <p:nvPr/>
+        </p:nvSpPr>
+        <p:spPr>
+          <a:xfrm>
+            <a:off x="1183340" y="0"/>
+            <a:ext cx="6763871" cy="369332"/>
+          </a:xfrm>
+          <a:prstGeom prst="rect">
+            <a:avLst/>
+          </a:prstGeom>
+          <a:noFill/>
+        </p:spPr>
+        <p:txBody>
+          <a:bodyPr wrap="square" rtlCol="0">
+            <a:spAutoFit/>
+          </a:bodyPr>
+          <a:lstStyle/>
+          <a:p>
+            <a:pPr algn="ctr"/>
+            <a:r>
+              <a:rPr lang="es-MX" sz="1800" b="1" dirty="0">
+                <a:latin typeface="Montserrat" panose="00000500000000000000" pitchFamily="2" charset="0"/>
+              </a:rPr>
+              <a:t>Información de gobierno en radiodifusoras</a:t>
+            </a:r>
+          </a:p>
+        </p:txBody>
+      </p:sp>
+      <p:pic>
+        <p:nvPicPr>
+          <p:cNvPr id="4" name="Imagen 3">
+            <a:extLst>
+              <a:ext uri="{FF2B5EF4-FFF2-40B4-BE49-F238E27FC236}">
+                <a16:creationId xmlns:a16="http://schemas.microsoft.com/office/drawing/2014/main" id="{98DFEF1E-2C9B-6A4F-BF6E-2D8681DD4564}"/>
+              </a:ext>
+            </a:extLst>
+          </p:cNvPr>
+          <p:cNvPicPr>
+            <a:picLocks noChangeAspect="1"/>
+          </p:cNvPicPr>
+          <p:nvPr/>
+        </p:nvPicPr>
+        <p:blipFill>
+          <a:blip r:embed="rId2"/>
+          <a:stretch>
+            <a:fillRect/>
+          </a:stretch>
+        </p:blipFill>
+        <p:spPr>
+          <a:xfrm>
+            <a:off x="0" y="1304551"/>
+            <a:ext cx="9144000" cy="2677274"/>
+          </a:xfrm>
+          <a:prstGeom prst="rect">
+            <a:avLst/>
+          </a:prstGeom>
+        </p:spPr>
+      </p:pic>
+    </p:spTree>
+    <p:extLst>
+      <p:ext uri="{BB962C8B-B14F-4D97-AF65-F5344CB8AC3E}">
+        <p14:creationId xmlns:p14="http://schemas.microsoft.com/office/powerpoint/2010/main" val="2250269201"/>
+      </p:ext>
+    </p:extLst>
+  </p:cSld>
+  <p:clrMapOvr>
+    <a:masterClrMapping/>
+  </p:clrMapOvr>
+</p:sld>
+</file>
+
+<file path=ppt/slides/slide12.xml><?xml version="1.0" encoding="utf-8"?>
+<p:sld xmlns:a="http://schemas.openxmlformats.org/drawingml/2006/main" xmlns:r="http://schemas.openxmlformats.org/officeDocument/2006/relationships" xmlns:p="http://schemas.openxmlformats.org/presentationml/2006/main">
+  <p:cSld>
+    <p:spTree>
+      <p:nvGrpSpPr>
+        <p:cNvPr id="1" name="">
+          <a:extLst>
+            <a:ext uri="{FF2B5EF4-FFF2-40B4-BE49-F238E27FC236}">
+              <a16:creationId xmlns:a16="http://schemas.microsoft.com/office/drawing/2014/main" id="{DB953E20-D2E3-C7B6-3681-7F75E49F37EF}"/>
+            </a:ext>
+          </a:extLst>
+        </p:cNvPr>
+        <p:cNvGrpSpPr/>
+        <p:nvPr/>
+      </p:nvGrpSpPr>
+      <p:grpSpPr>
+        <a:xfrm>
+          <a:off x="0" y="0"/>
+          <a:ext cx="0" cy="0"/>
+          <a:chOff x="0" y="0"/>
+          <a:chExt cx="0" cy="0"/>
+        </a:xfrm>
+      </p:grpSpPr>
+      <p:sp>
+        <p:nvSpPr>
+          <p:cNvPr id="5" name="CuadroTexto 4">
+            <a:extLst>
+              <a:ext uri="{FF2B5EF4-FFF2-40B4-BE49-F238E27FC236}">
+                <a16:creationId xmlns:a16="http://schemas.microsoft.com/office/drawing/2014/main" id="{2D220DED-6E95-D0AE-57E3-7DFB60F03ADD}"/>
+              </a:ext>
+            </a:extLst>
+          </p:cNvPr>
+          <p:cNvSpPr txBox="1"/>
+          <p:nvPr/>
+        </p:nvSpPr>
+        <p:spPr>
+          <a:xfrm>
+            <a:off x="1183340" y="0"/>
+            <a:ext cx="6763871" cy="369332"/>
+          </a:xfrm>
+          <a:prstGeom prst="rect">
+            <a:avLst/>
+          </a:prstGeom>
+          <a:noFill/>
+        </p:spPr>
+        <p:txBody>
+          <a:bodyPr wrap="square" rtlCol="0">
+            <a:spAutoFit/>
+          </a:bodyPr>
+          <a:lstStyle/>
+          <a:p>
+            <a:pPr algn="ctr"/>
+            <a:r>
+              <a:rPr lang="es-MX" sz="1800" b="1" dirty="0">
+                <a:latin typeface="Montserrat" panose="00000500000000000000" pitchFamily="2" charset="0"/>
+              </a:rPr>
+              <a:t>Información de gobierno en radiodifusoras</a:t>
+            </a:r>
+          </a:p>
+        </p:txBody>
+      </p:sp>
+      <p:pic>
+        <p:nvPicPr>
+          <p:cNvPr id="3" name="Imagen 2">
+            <a:extLst>
+              <a:ext uri="{FF2B5EF4-FFF2-40B4-BE49-F238E27FC236}">
+                <a16:creationId xmlns:a16="http://schemas.microsoft.com/office/drawing/2014/main" id="{28EB7E4D-FB50-5A76-B0CF-F453F96893F3}"/>
+              </a:ext>
+            </a:extLst>
+          </p:cNvPr>
+          <p:cNvPicPr>
+            <a:picLocks noChangeAspect="1"/>
+          </p:cNvPicPr>
+          <p:nvPr/>
+        </p:nvPicPr>
+        <p:blipFill>
+          <a:blip r:embed="rId2"/>
+          <a:stretch>
+            <a:fillRect/>
+          </a:stretch>
+        </p:blipFill>
+        <p:spPr>
+          <a:xfrm>
+            <a:off x="0" y="722753"/>
+            <a:ext cx="9144000" cy="3840870"/>
+          </a:xfrm>
+          <a:prstGeom prst="rect">
+            <a:avLst/>
+          </a:prstGeom>
+        </p:spPr>
+      </p:pic>
+    </p:spTree>
+    <p:extLst>
+      <p:ext uri="{BB962C8B-B14F-4D97-AF65-F5344CB8AC3E}">
+        <p14:creationId xmlns:p14="http://schemas.microsoft.com/office/powerpoint/2010/main" val="4224919290"/>
+      </p:ext>
+    </p:extLst>
+  </p:cSld>
+  <p:clrMapOvr>
+    <a:masterClrMapping/>
+  </p:clrMapOvr>
+</p:sld>
+</file>
+
+<file path=ppt/slides/slide13.xml><?xml version="1.0" encoding="utf-8"?>
+<p:sld xmlns:a="http://schemas.openxmlformats.org/drawingml/2006/main" xmlns:r="http://schemas.openxmlformats.org/officeDocument/2006/relationships" xmlns:p="http://schemas.openxmlformats.org/presentationml/2006/main">
+  <p:cSld>
+    <p:spTree>
+      <p:nvGrpSpPr>
+        <p:cNvPr id="1" name=""/>
+        <p:cNvGrpSpPr/>
+        <p:nvPr/>
+      </p:nvGrpSpPr>
+      <p:grpSpPr>
+        <a:xfrm>
+          <a:off x="0" y="0"/>
+          <a:ext cx="0" cy="0"/>
+          <a:chOff x="0" y="0"/>
+          <a:chExt cx="0" cy="0"/>
+        </a:xfrm>
+      </p:grpSpPr>
+      <p:sp>
+        <p:nvSpPr>
+          <p:cNvPr id="2" name="CuadroTexto 1">
+            <a:extLst>
+              <a:ext uri="{FF2B5EF4-FFF2-40B4-BE49-F238E27FC236}">
+                <a16:creationId xmlns:a16="http://schemas.microsoft.com/office/drawing/2014/main" id="{E270743E-55A0-8447-939B-33D92F1087F2}"/>
+              </a:ext>
+            </a:extLst>
+          </p:cNvPr>
+          <p:cNvSpPr txBox="1"/>
+          <p:nvPr/>
+        </p:nvSpPr>
+        <p:spPr>
+          <a:xfrm>
+            <a:off x="1183340" y="0"/>
+            <a:ext cx="6763871" cy="369332"/>
+          </a:xfrm>
+          <a:prstGeom prst="rect">
+            <a:avLst/>
+          </a:prstGeom>
+          <a:noFill/>
+        </p:spPr>
+        <p:txBody>
+          <a:bodyPr wrap="square" rtlCol="0">
+            <a:spAutoFit/>
+          </a:bodyPr>
+          <a:lstStyle/>
+          <a:p>
+            <a:pPr algn="ctr"/>
+            <a:r>
+              <a:rPr lang="es-MX" sz="1800" b="1" dirty="0">
+                <a:latin typeface="Montserrat" panose="00000500000000000000" pitchFamily="2" charset="0"/>
+              </a:rPr>
+              <a:t>Información de gobierno en radiodifusoras</a:t>
+            </a:r>
+          </a:p>
+        </p:txBody>
+      </p:sp>
+      <p:pic>
+        <p:nvPicPr>
+          <p:cNvPr id="5" name="Imagen 4">
+            <a:extLst>
+              <a:ext uri="{FF2B5EF4-FFF2-40B4-BE49-F238E27FC236}">
+                <a16:creationId xmlns:a16="http://schemas.microsoft.com/office/drawing/2014/main" id="{33152F83-6DE9-2CC5-E267-426499926CDC}"/>
+              </a:ext>
+            </a:extLst>
+          </p:cNvPr>
+          <p:cNvPicPr>
+            <a:picLocks noChangeAspect="1"/>
+          </p:cNvPicPr>
+          <p:nvPr/>
+        </p:nvPicPr>
+        <p:blipFill>
+          <a:blip r:embed="rId2"/>
+          <a:stretch>
+            <a:fillRect/>
+          </a:stretch>
+        </p:blipFill>
+        <p:spPr>
+          <a:xfrm>
+            <a:off x="0" y="1282232"/>
+            <a:ext cx="9144000" cy="2721911"/>
+          </a:xfrm>
+          <a:prstGeom prst="rect">
+            <a:avLst/>
+          </a:prstGeom>
+        </p:spPr>
+      </p:pic>
+    </p:spTree>
+    <p:extLst>
+      <p:ext uri="{BB962C8B-B14F-4D97-AF65-F5344CB8AC3E}">
+        <p14:creationId xmlns:p14="http://schemas.microsoft.com/office/powerpoint/2010/main" val="1977228479"/>
+      </p:ext>
+    </p:extLst>
+  </p:cSld>
+  <p:clrMapOvr>
+    <a:masterClrMapping/>
+  </p:clrMapOvr>
+</p:sld>
+</file>
+
+<file path=ppt/slides/slide14.xml><?xml version="1.0" encoding="utf-8"?>
 <p:sld xmlns:a="http://schemas.openxmlformats.org/drawingml/2006/main" xmlns:r="http://schemas.openxmlformats.org/officeDocument/2006/relationships" xmlns:p="http://schemas.openxmlformats.org/presentationml/2006/main">
   <p:cSld>
     <p:spTree>
@@ -6266,10 +6674,10 @@
       </p:sp>
       <p:pic>
         <p:nvPicPr>
-          <p:cNvPr id="4" name="Imagen 3">
+          <p:cNvPr id="3" name="Imagen 2">
             <a:extLst>
               <a:ext uri="{FF2B5EF4-FFF2-40B4-BE49-F238E27FC236}">
-                <a16:creationId xmlns:a16="http://schemas.microsoft.com/office/drawing/2014/main" id="{79CA9401-034D-6DD2-F601-253AF7AD4F74}"/>
+                <a16:creationId xmlns:a16="http://schemas.microsoft.com/office/drawing/2014/main" id="{40EAE6F9-80AA-739C-1BB7-173AE5866B3D}"/>
               </a:ext>
             </a:extLst>
           </p:cNvPr>
@@ -6286,8 +6694,8 @@
         </p:blipFill>
         <p:spPr>
           <a:xfrm>
-            <a:off x="0" y="619204"/>
-            <a:ext cx="9144000" cy="3905092"/>
+            <a:off x="0" y="633343"/>
+            <a:ext cx="9144000" cy="3876813"/>
           </a:xfrm>
           <a:prstGeom prst="rect">
             <a:avLst/>
@@ -6307,7 +6715,7 @@
 </p:sld>
 </file>
 
-<file path=ppt/slides/slide11.xml><?xml version="1.0" encoding="utf-8"?>
+<file path=ppt/slides/slide15.xml><?xml version="1.0" encoding="utf-8"?>
 <p:sld xmlns:a="http://schemas.openxmlformats.org/drawingml/2006/main" xmlns:r="http://schemas.openxmlformats.org/officeDocument/2006/relationships" xmlns:p="http://schemas.openxmlformats.org/presentationml/2006/main">
   <p:cSld>
     <p:spTree>
@@ -6364,10 +6772,10 @@
       </p:sp>
       <p:pic>
         <p:nvPicPr>
-          <p:cNvPr id="5" name="Imagen 4">
+          <p:cNvPr id="3" name="Imagen 2">
             <a:extLst>
               <a:ext uri="{FF2B5EF4-FFF2-40B4-BE49-F238E27FC236}">
-                <a16:creationId xmlns:a16="http://schemas.microsoft.com/office/drawing/2014/main" id="{58B6BA3A-E6A4-8F21-0DC2-57C74DE0D2F9}"/>
+                <a16:creationId xmlns:a16="http://schemas.microsoft.com/office/drawing/2014/main" id="{C9BC924C-0E18-D336-56F4-4ACAC570E6F6}"/>
               </a:ext>
             </a:extLst>
           </p:cNvPr>
@@ -6384,8 +6792,8 @@
         </p:blipFill>
         <p:spPr>
           <a:xfrm>
-            <a:off x="1639502" y="269271"/>
-            <a:ext cx="5791971" cy="4874229"/>
+            <a:off x="0" y="1480573"/>
+            <a:ext cx="9144000" cy="2182353"/>
           </a:xfrm>
           <a:prstGeom prst="rect">
             <a:avLst/>
@@ -6405,7 +6813,7 @@
 </p:sld>
 </file>
 
-<file path=ppt/slides/slide12.xml><?xml version="1.0" encoding="utf-8"?>
+<file path=ppt/slides/slide16.xml><?xml version="1.0" encoding="utf-8"?>
 <p:sld xmlns:a="http://schemas.openxmlformats.org/drawingml/2006/main" xmlns:r="http://schemas.openxmlformats.org/officeDocument/2006/relationships" xmlns:p="http://schemas.openxmlformats.org/presentationml/2006/main">
   <p:cSld>
     <p:spTree>
@@ -6532,10 +6940,10 @@
       </p:sp>
       <p:pic>
         <p:nvPicPr>
-          <p:cNvPr id="3" name="Imagen 2">
+          <p:cNvPr id="4" name="Imagen 3">
             <a:extLst>
               <a:ext uri="{FF2B5EF4-FFF2-40B4-BE49-F238E27FC236}">
-                <a16:creationId xmlns:a16="http://schemas.microsoft.com/office/drawing/2014/main" id="{899C9C6C-F985-EC39-7CAB-CD6C3EFD0CAC}"/>
+                <a16:creationId xmlns:a16="http://schemas.microsoft.com/office/drawing/2014/main" id="{E4F52BB6-62D0-BC68-A1D9-E674164B74CB}"/>
               </a:ext>
             </a:extLst>
           </p:cNvPr>
@@ -6552,8 +6960,8 @@
         </p:blipFill>
         <p:spPr>
           <a:xfrm>
-            <a:off x="0" y="874643"/>
-            <a:ext cx="9144000" cy="3394213"/>
+            <a:off x="0" y="959287"/>
+            <a:ext cx="9144000" cy="3367801"/>
           </a:xfrm>
           <a:prstGeom prst="rect">
             <a:avLst/>
@@ -6640,10 +7048,10 @@
       </p:sp>
       <p:pic>
         <p:nvPicPr>
-          <p:cNvPr id="3" name="Imagen 2">
+          <p:cNvPr id="4" name="Imagen 3">
             <a:extLst>
               <a:ext uri="{FF2B5EF4-FFF2-40B4-BE49-F238E27FC236}">
-                <a16:creationId xmlns:a16="http://schemas.microsoft.com/office/drawing/2014/main" id="{6A58B58B-2769-5CA5-A9ED-8345D3D00217}"/>
+                <a16:creationId xmlns:a16="http://schemas.microsoft.com/office/drawing/2014/main" id="{0C608DC4-DA30-5F0A-83D4-6F566687E272}"/>
               </a:ext>
             </a:extLst>
           </p:cNvPr>
@@ -6660,8 +7068,8 @@
         </p:blipFill>
         <p:spPr>
           <a:xfrm>
-            <a:off x="0" y="1332053"/>
-            <a:ext cx="9144000" cy="2479393"/>
+            <a:off x="0" y="1388812"/>
+            <a:ext cx="9144000" cy="2508751"/>
           </a:xfrm>
           <a:prstGeom prst="rect">
             <a:avLst/>
@@ -6754,10 +7162,10 @@
       </p:sp>
       <p:pic>
         <p:nvPicPr>
-          <p:cNvPr id="2" name="Imagen 1">
+          <p:cNvPr id="3" name="Imagen 2">
             <a:extLst>
               <a:ext uri="{FF2B5EF4-FFF2-40B4-BE49-F238E27FC236}">
-                <a16:creationId xmlns:a16="http://schemas.microsoft.com/office/drawing/2014/main" id="{89950CBD-3CDF-3377-024B-C7A50D9B5EB6}"/>
+                <a16:creationId xmlns:a16="http://schemas.microsoft.com/office/drawing/2014/main" id="{858082AF-7E51-EA5A-C8BA-4FA9D97BBAFE}"/>
               </a:ext>
             </a:extLst>
           </p:cNvPr>
@@ -6774,8 +7182,8 @@
         </p:blipFill>
         <p:spPr>
           <a:xfrm>
-            <a:off x="340564" y="528908"/>
-            <a:ext cx="8389847" cy="4228560"/>
+            <a:off x="85888" y="400549"/>
+            <a:ext cx="8899200" cy="4485278"/>
           </a:xfrm>
           <a:prstGeom prst="rect">
             <a:avLst/>
@@ -6858,10 +7266,10 @@
       </p:sp>
       <p:pic>
         <p:nvPicPr>
-          <p:cNvPr id="4" name="Imagen 3">
+          <p:cNvPr id="3" name="Imagen 2">
             <a:extLst>
               <a:ext uri="{FF2B5EF4-FFF2-40B4-BE49-F238E27FC236}">
-                <a16:creationId xmlns:a16="http://schemas.microsoft.com/office/drawing/2014/main" id="{F7052B56-9BC3-74F8-613F-E2745F20C323}"/>
+                <a16:creationId xmlns:a16="http://schemas.microsoft.com/office/drawing/2014/main" id="{879B80AB-CDC2-B933-2466-8650FECBD73A}"/>
               </a:ext>
             </a:extLst>
           </p:cNvPr>
@@ -6878,38 +7286,8 @@
         </p:blipFill>
         <p:spPr>
           <a:xfrm>
-            <a:off x="582060" y="521758"/>
-            <a:ext cx="7906853" cy="2362530"/>
-          </a:xfrm>
-          <a:prstGeom prst="rect">
-            <a:avLst/>
-          </a:prstGeom>
-        </p:spPr>
-      </p:pic>
-      <p:pic>
-        <p:nvPicPr>
-          <p:cNvPr id="6" name="Imagen 5">
-            <a:extLst>
-              <a:ext uri="{FF2B5EF4-FFF2-40B4-BE49-F238E27FC236}">
-                <a16:creationId xmlns:a16="http://schemas.microsoft.com/office/drawing/2014/main" id="{786C120D-A267-00FD-C14D-6D5E2CED0578}"/>
-              </a:ext>
-            </a:extLst>
-          </p:cNvPr>
-          <p:cNvPicPr>
-            <a:picLocks noChangeAspect="1"/>
-          </p:cNvPicPr>
-          <p:nvPr/>
-        </p:nvPicPr>
-        <p:blipFill>
-          <a:blip r:embed="rId3"/>
-          <a:stretch>
-            <a:fillRect/>
-          </a:stretch>
-        </p:blipFill>
-        <p:spPr>
-          <a:xfrm>
-            <a:off x="543956" y="3183266"/>
-            <a:ext cx="7983064" cy="1438476"/>
+            <a:off x="2400453" y="521758"/>
+            <a:ext cx="4270070" cy="4351924"/>
           </a:xfrm>
           <a:prstGeom prst="rect">
             <a:avLst/>
@@ -6932,12 +7310,20 @@
 <file path=ppt/slides/slide6.xml><?xml version="1.0" encoding="utf-8"?>
 <p:sld xmlns:a="http://schemas.openxmlformats.org/drawingml/2006/main" xmlns:r="http://schemas.openxmlformats.org/officeDocument/2006/relationships" xmlns:p="http://schemas.openxmlformats.org/presentationml/2006/main">
   <p:cSld>
+    <p:bg>
+      <p:bgPr>
+        <a:solidFill>
+          <a:srgbClr val="F4F6F8"/>
+        </a:solidFill>
+        <a:effectLst/>
+      </p:bgPr>
+    </p:bg>
     <p:spTree>
       <p:nvGrpSpPr>
-        <p:cNvPr id="1" name="Shape 108">
+        <p:cNvPr id="1" name="">
           <a:extLst>
             <a:ext uri="{FF2B5EF4-FFF2-40B4-BE49-F238E27FC236}">
-              <a16:creationId xmlns:a16="http://schemas.microsoft.com/office/drawing/2014/main" id="{3AB59246-6522-404E-9FEB-F1E85E07D6CC}"/>
+              <a16:creationId xmlns:a16="http://schemas.microsoft.com/office/drawing/2014/main" id="{DBF384B7-8BD8-1B37-5F51-FD46B11FD035}"/>
             </a:ext>
           </a:extLst>
         </p:cNvPr>
@@ -6954,20 +7340,22 @@
       </p:grpSpPr>
       <p:sp>
         <p:nvSpPr>
-          <p:cNvPr id="2" name="CuadroTexto 1">
+          <p:cNvPr id="8" name="CuadroTexto 7">
             <a:extLst>
               <a:ext uri="{FF2B5EF4-FFF2-40B4-BE49-F238E27FC236}">
-                <a16:creationId xmlns:a16="http://schemas.microsoft.com/office/drawing/2014/main" id="{AE07F171-51E8-E8F4-27C7-0CA3B7A8A997}"/>
+                <a16:creationId xmlns:a16="http://schemas.microsoft.com/office/drawing/2014/main" id="{5D745B17-E8D1-051C-B27F-A3B591D8F7FD}"/>
               </a:ext>
             </a:extLst>
           </p:cNvPr>
-          <p:cNvSpPr txBox="1"/>
+          <p:cNvSpPr txBox="1">
+            <a:spLocks noGrp="1" noRot="1" noMove="1" noResize="1" noEditPoints="1" noAdjustHandles="1" noChangeArrowheads="1" noChangeShapeType="1"/>
+          </p:cNvSpPr>
           <p:nvPr/>
         </p:nvSpPr>
         <p:spPr>
           <a:xfrm>
-            <a:off x="1183340" y="0"/>
-            <a:ext cx="6763871" cy="369332"/>
+            <a:off x="1828800" y="0"/>
+            <a:ext cx="5486400" cy="523220"/>
           </a:xfrm>
           <a:prstGeom prst="rect">
             <a:avLst/>
@@ -6982,108 +7370,10 @@
           <a:p>
             <a:pPr algn="ctr"/>
             <a:r>
-              <a:rPr lang="es-MX" sz="1800" b="1" dirty="0">
-                <a:latin typeface="Montserrat" panose="00000500000000000000" pitchFamily="2" charset="0"/>
+              <a:rPr lang="es-MX" sz="2800" b="1" dirty="0">
+                <a:latin typeface="Montserrat" pitchFamily="2" charset="0"/>
               </a:rPr>
-              <a:t>Información de gobierno en radiodifusoras</a:t>
-            </a:r>
-          </a:p>
-        </p:txBody>
-      </p:sp>
-      <p:pic>
-        <p:nvPicPr>
-          <p:cNvPr id="4" name="Imagen 3">
-            <a:extLst>
-              <a:ext uri="{FF2B5EF4-FFF2-40B4-BE49-F238E27FC236}">
-                <a16:creationId xmlns:a16="http://schemas.microsoft.com/office/drawing/2014/main" id="{E18DAF95-EC9F-4EB7-50BA-45CA3607AF73}"/>
-              </a:ext>
-            </a:extLst>
-          </p:cNvPr>
-          <p:cNvPicPr>
-            <a:picLocks noChangeAspect="1"/>
-          </p:cNvPicPr>
-          <p:nvPr/>
-        </p:nvPicPr>
-        <p:blipFill>
-          <a:blip r:embed="rId3"/>
-          <a:stretch>
-            <a:fillRect/>
-          </a:stretch>
-        </p:blipFill>
-        <p:spPr>
-          <a:xfrm>
-            <a:off x="0" y="819815"/>
-            <a:ext cx="9144000" cy="3503869"/>
-          </a:xfrm>
-          <a:prstGeom prst="rect">
-            <a:avLst/>
-          </a:prstGeom>
-        </p:spPr>
-      </p:pic>
-    </p:spTree>
-    <p:extLst>
-      <p:ext uri="{BB962C8B-B14F-4D97-AF65-F5344CB8AC3E}">
-        <p14:creationId xmlns:p14="http://schemas.microsoft.com/office/powerpoint/2010/main" val="3295811942"/>
-      </p:ext>
-    </p:extLst>
-  </p:cSld>
-  <p:clrMapOvr>
-    <a:masterClrMapping/>
-  </p:clrMapOvr>
-</p:sld>
-</file>
-
-<file path=ppt/slides/slide7.xml><?xml version="1.0" encoding="utf-8"?>
-<p:sld xmlns:a="http://schemas.openxmlformats.org/drawingml/2006/main" xmlns:r="http://schemas.openxmlformats.org/officeDocument/2006/relationships" xmlns:p="http://schemas.openxmlformats.org/presentationml/2006/main">
-  <p:cSld>
-    <p:spTree>
-      <p:nvGrpSpPr>
-        <p:cNvPr id="1" name=""/>
-        <p:cNvGrpSpPr/>
-        <p:nvPr/>
-      </p:nvGrpSpPr>
-      <p:grpSpPr>
-        <a:xfrm>
-          <a:off x="0" y="0"/>
-          <a:ext cx="0" cy="0"/>
-          <a:chOff x="0" y="0"/>
-          <a:chExt cx="0" cy="0"/>
-        </a:xfrm>
-      </p:grpSpPr>
-      <p:sp>
-        <p:nvSpPr>
-          <p:cNvPr id="5" name="CuadroTexto 4">
-            <a:extLst>
-              <a:ext uri="{FF2B5EF4-FFF2-40B4-BE49-F238E27FC236}">
-                <a16:creationId xmlns:a16="http://schemas.microsoft.com/office/drawing/2014/main" id="{1430F0AF-D0FD-1C68-F7C4-D9E93764E31F}"/>
-              </a:ext>
-            </a:extLst>
-          </p:cNvPr>
-          <p:cNvSpPr txBox="1"/>
-          <p:nvPr/>
-        </p:nvSpPr>
-        <p:spPr>
-          <a:xfrm>
-            <a:off x="1183340" y="0"/>
-            <a:ext cx="6763871" cy="369332"/>
-          </a:xfrm>
-          <a:prstGeom prst="rect">
-            <a:avLst/>
-          </a:prstGeom>
-          <a:noFill/>
-        </p:spPr>
-        <p:txBody>
-          <a:bodyPr wrap="square" rtlCol="0">
-            <a:spAutoFit/>
-          </a:bodyPr>
-          <a:lstStyle/>
-          <a:p>
-            <a:pPr algn="ctr"/>
-            <a:r>
-              <a:rPr lang="es-MX" sz="1800" b="1" dirty="0">
-                <a:latin typeface="Montserrat" panose="00000500000000000000" pitchFamily="2" charset="0"/>
-              </a:rPr>
-              <a:t>Información de gobierno en radiodifusoras</a:t>
+              <a:t>Gobernador</a:t>
             </a:r>
           </a:p>
         </p:txBody>
@@ -7093,7 +7383,7 @@
           <p:cNvPr id="3" name="Imagen 2">
             <a:extLst>
               <a:ext uri="{FF2B5EF4-FFF2-40B4-BE49-F238E27FC236}">
-                <a16:creationId xmlns:a16="http://schemas.microsoft.com/office/drawing/2014/main" id="{731AB622-01B9-8F34-2109-68F9D6D207CA}"/>
+                <a16:creationId xmlns:a16="http://schemas.microsoft.com/office/drawing/2014/main" id="{717BB299-CD2D-87AC-49FC-C8E342329198}"/>
               </a:ext>
             </a:extLst>
           </p:cNvPr>
@@ -7110,8 +7400,8 @@
         </p:blipFill>
         <p:spPr>
           <a:xfrm>
-            <a:off x="0" y="1275175"/>
-            <a:ext cx="9144000" cy="2593150"/>
+            <a:off x="0" y="875565"/>
+            <a:ext cx="9144000" cy="3392369"/>
           </a:xfrm>
           <a:prstGeom prst="rect">
             <a:avLst/>
@@ -7121,7 +7411,7 @@
     </p:spTree>
     <p:extLst>
       <p:ext uri="{BB962C8B-B14F-4D97-AF65-F5344CB8AC3E}">
-        <p14:creationId xmlns:p14="http://schemas.microsoft.com/office/powerpoint/2010/main" val="2250269201"/>
+        <p14:creationId xmlns:p14="http://schemas.microsoft.com/office/powerpoint/2010/main" val="997708313"/>
       </p:ext>
     </p:extLst>
   </p:cSld>
@@ -7131,15 +7421,23 @@
 </p:sld>
 </file>
 
-<file path=ppt/slides/slide8.xml><?xml version="1.0" encoding="utf-8"?>
+<file path=ppt/slides/slide7.xml><?xml version="1.0" encoding="utf-8"?>
 <p:sld xmlns:a="http://schemas.openxmlformats.org/drawingml/2006/main" xmlns:r="http://schemas.openxmlformats.org/officeDocument/2006/relationships" xmlns:p="http://schemas.openxmlformats.org/presentationml/2006/main">
   <p:cSld>
+    <p:bg>
+      <p:bgPr>
+        <a:solidFill>
+          <a:srgbClr val="F4F6F8"/>
+        </a:solidFill>
+        <a:effectLst/>
+      </p:bgPr>
+    </p:bg>
     <p:spTree>
       <p:nvGrpSpPr>
         <p:cNvPr id="1" name="">
           <a:extLst>
             <a:ext uri="{FF2B5EF4-FFF2-40B4-BE49-F238E27FC236}">
-              <a16:creationId xmlns:a16="http://schemas.microsoft.com/office/drawing/2014/main" id="{DB953E20-D2E3-C7B6-3681-7F75E49F37EF}"/>
+              <a16:creationId xmlns:a16="http://schemas.microsoft.com/office/drawing/2014/main" id="{A8383A7D-6E95-7FBD-ECB9-6F21EFAB59E3}"/>
             </a:ext>
           </a:extLst>
         </p:cNvPr>
@@ -7156,20 +7454,22 @@
       </p:grpSpPr>
       <p:sp>
         <p:nvSpPr>
-          <p:cNvPr id="5" name="CuadroTexto 4">
+          <p:cNvPr id="8" name="CuadroTexto 7">
             <a:extLst>
               <a:ext uri="{FF2B5EF4-FFF2-40B4-BE49-F238E27FC236}">
-                <a16:creationId xmlns:a16="http://schemas.microsoft.com/office/drawing/2014/main" id="{2D220DED-6E95-D0AE-57E3-7DFB60F03ADD}"/>
+                <a16:creationId xmlns:a16="http://schemas.microsoft.com/office/drawing/2014/main" id="{EF6B6CD5-AF4A-39E2-B949-E9735271D8E0}"/>
               </a:ext>
             </a:extLst>
           </p:cNvPr>
-          <p:cNvSpPr txBox="1"/>
+          <p:cNvSpPr txBox="1">
+            <a:spLocks noGrp="1" noRot="1" noMove="1" noResize="1" noEditPoints="1" noAdjustHandles="1" noChangeArrowheads="1" noChangeShapeType="1"/>
+          </p:cNvSpPr>
           <p:nvPr/>
         </p:nvSpPr>
         <p:spPr>
           <a:xfrm>
-            <a:off x="1183340" y="0"/>
-            <a:ext cx="6763871" cy="369332"/>
+            <a:off x="1828800" y="0"/>
+            <a:ext cx="5486400" cy="523220"/>
           </a:xfrm>
           <a:prstGeom prst="rect">
             <a:avLst/>
@@ -7184,20 +7484,20 @@
           <a:p>
             <a:pPr algn="ctr"/>
             <a:r>
-              <a:rPr lang="es-MX" sz="1800" b="1" dirty="0">
-                <a:latin typeface="Montserrat" panose="00000500000000000000" pitchFamily="2" charset="0"/>
+              <a:rPr lang="es-MX" sz="2800" b="1" dirty="0">
+                <a:latin typeface="Montserrat" pitchFamily="2" charset="0"/>
               </a:rPr>
-              <a:t>Información de gobierno en radiodifusoras</a:t>
+              <a:t>Gobernador medios</a:t>
             </a:r>
           </a:p>
         </p:txBody>
       </p:sp>
       <p:pic>
         <p:nvPicPr>
-          <p:cNvPr id="4" name="Imagen 3">
+          <p:cNvPr id="2" name="Imagen 1">
             <a:extLst>
               <a:ext uri="{FF2B5EF4-FFF2-40B4-BE49-F238E27FC236}">
-                <a16:creationId xmlns:a16="http://schemas.microsoft.com/office/drawing/2014/main" id="{11E9E3B4-D6DE-FA0A-B286-43D64FC60D64}"/>
+                <a16:creationId xmlns:a16="http://schemas.microsoft.com/office/drawing/2014/main" id="{4583C605-D860-670C-4674-CAC4D9D2BBB9}"/>
               </a:ext>
             </a:extLst>
           </p:cNvPr>
@@ -7214,8 +7514,8 @@
         </p:blipFill>
         <p:spPr>
           <a:xfrm>
-            <a:off x="0" y="747250"/>
-            <a:ext cx="9144000" cy="3937000"/>
+            <a:off x="1143000" y="914940"/>
+            <a:ext cx="6858000" cy="3456495"/>
           </a:xfrm>
           <a:prstGeom prst="rect">
             <a:avLst/>
@@ -7225,7 +7525,7 @@
     </p:spTree>
     <p:extLst>
       <p:ext uri="{BB962C8B-B14F-4D97-AF65-F5344CB8AC3E}">
-        <p14:creationId xmlns:p14="http://schemas.microsoft.com/office/powerpoint/2010/main" val="4224919290"/>
+        <p14:creationId xmlns:p14="http://schemas.microsoft.com/office/powerpoint/2010/main" val="2030097737"/>
       </p:ext>
     </p:extLst>
   </p:cSld>
@@ -7235,12 +7535,26 @@
 </p:sld>
 </file>
 
-<file path=ppt/slides/slide9.xml><?xml version="1.0" encoding="utf-8"?>
+<file path=ppt/slides/slide8.xml><?xml version="1.0" encoding="utf-8"?>
 <p:sld xmlns:a="http://schemas.openxmlformats.org/drawingml/2006/main" xmlns:r="http://schemas.openxmlformats.org/officeDocument/2006/relationships" xmlns:p="http://schemas.openxmlformats.org/presentationml/2006/main">
   <p:cSld>
+    <p:bg>
+      <p:bgPr>
+        <a:solidFill>
+          <a:srgbClr val="F4F6F8"/>
+        </a:solidFill>
+        <a:effectLst/>
+      </p:bgPr>
+    </p:bg>
     <p:spTree>
       <p:nvGrpSpPr>
-        <p:cNvPr id="1" name=""/>
+        <p:cNvPr id="1" name="">
+          <a:extLst>
+            <a:ext uri="{FF2B5EF4-FFF2-40B4-BE49-F238E27FC236}">
+              <a16:creationId xmlns:a16="http://schemas.microsoft.com/office/drawing/2014/main" id="{D3569AC2-17AA-6728-4169-8404B6464668}"/>
+            </a:ext>
+          </a:extLst>
+        </p:cNvPr>
         <p:cNvGrpSpPr/>
         <p:nvPr/>
       </p:nvGrpSpPr>
@@ -7254,20 +7568,22 @@
       </p:grpSpPr>
       <p:sp>
         <p:nvSpPr>
-          <p:cNvPr id="2" name="CuadroTexto 1">
+          <p:cNvPr id="8" name="CuadroTexto 7">
             <a:extLst>
               <a:ext uri="{FF2B5EF4-FFF2-40B4-BE49-F238E27FC236}">
-                <a16:creationId xmlns:a16="http://schemas.microsoft.com/office/drawing/2014/main" id="{E270743E-55A0-8447-939B-33D92F1087F2}"/>
+                <a16:creationId xmlns:a16="http://schemas.microsoft.com/office/drawing/2014/main" id="{FC488274-DEF2-00AA-CBB0-3ADE1D32DCEB}"/>
               </a:ext>
             </a:extLst>
           </p:cNvPr>
-          <p:cNvSpPr txBox="1"/>
+          <p:cNvSpPr txBox="1">
+            <a:spLocks noGrp="1" noRot="1" noMove="1" noResize="1" noEditPoints="1" noAdjustHandles="1" noChangeArrowheads="1" noChangeShapeType="1"/>
+          </p:cNvSpPr>
           <p:nvPr/>
         </p:nvSpPr>
         <p:spPr>
           <a:xfrm>
-            <a:off x="1183340" y="0"/>
-            <a:ext cx="6763871" cy="369332"/>
+            <a:off x="1828800" y="0"/>
+            <a:ext cx="5486400" cy="523220"/>
           </a:xfrm>
           <a:prstGeom prst="rect">
             <a:avLst/>
@@ -7282,20 +7598,20 @@
           <a:p>
             <a:pPr algn="ctr"/>
             <a:r>
-              <a:rPr lang="es-MX" sz="1800" b="1" dirty="0">
-                <a:latin typeface="Montserrat" panose="00000500000000000000" pitchFamily="2" charset="0"/>
+              <a:rPr lang="es-MX" sz="2800" b="1" dirty="0">
+                <a:latin typeface="Montserrat" pitchFamily="2" charset="0"/>
               </a:rPr>
-              <a:t>Información de gobierno en radiodifusoras</a:t>
+              <a:t>Gobernador temas</a:t>
             </a:r>
           </a:p>
         </p:txBody>
       </p:sp>
       <p:pic>
         <p:nvPicPr>
-          <p:cNvPr id="4" name="Imagen 3">
+          <p:cNvPr id="3" name="Imagen 2">
             <a:extLst>
               <a:ext uri="{FF2B5EF4-FFF2-40B4-BE49-F238E27FC236}">
-                <a16:creationId xmlns:a16="http://schemas.microsoft.com/office/drawing/2014/main" id="{0BF1E5F0-A911-E1A2-B45A-24817A16473D}"/>
+                <a16:creationId xmlns:a16="http://schemas.microsoft.com/office/drawing/2014/main" id="{F6CD79E3-948C-E878-BF4F-3F0E4A09AEC2}"/>
               </a:ext>
             </a:extLst>
           </p:cNvPr>
@@ -7312,8 +7628,8 @@
         </p:blipFill>
         <p:spPr>
           <a:xfrm>
-            <a:off x="0" y="1249285"/>
-            <a:ext cx="9144000" cy="2787805"/>
+            <a:off x="109675" y="463378"/>
+            <a:ext cx="8609013" cy="4339022"/>
           </a:xfrm>
           <a:prstGeom prst="rect">
             <a:avLst/>
@@ -7323,7 +7639,117 @@
     </p:spTree>
     <p:extLst>
       <p:ext uri="{BB962C8B-B14F-4D97-AF65-F5344CB8AC3E}">
-        <p14:creationId xmlns:p14="http://schemas.microsoft.com/office/powerpoint/2010/main" val="1977228479"/>
+        <p14:creationId xmlns:p14="http://schemas.microsoft.com/office/powerpoint/2010/main" val="3736623944"/>
+      </p:ext>
+    </p:extLst>
+  </p:cSld>
+  <p:clrMapOvr>
+    <a:masterClrMapping/>
+  </p:clrMapOvr>
+</p:sld>
+</file>
+
+<file path=ppt/slides/slide9.xml><?xml version="1.0" encoding="utf-8"?>
+<p:sld xmlns:a="http://schemas.openxmlformats.org/drawingml/2006/main" xmlns:r="http://schemas.openxmlformats.org/officeDocument/2006/relationships" xmlns:p="http://schemas.openxmlformats.org/presentationml/2006/main">
+  <p:cSld>
+    <p:spTree>
+      <p:nvGrpSpPr>
+        <p:cNvPr id="1" name="">
+          <a:extLst>
+            <a:ext uri="{FF2B5EF4-FFF2-40B4-BE49-F238E27FC236}">
+              <a16:creationId xmlns:a16="http://schemas.microsoft.com/office/drawing/2014/main" id="{BEE1564A-4863-8A17-FDE9-1251B67B1709}"/>
+            </a:ext>
+          </a:extLst>
+        </p:cNvPr>
+        <p:cNvGrpSpPr/>
+        <p:nvPr/>
+      </p:nvGrpSpPr>
+      <p:grpSpPr>
+        <a:xfrm>
+          <a:off x="0" y="0"/>
+          <a:ext cx="0" cy="0"/>
+          <a:chOff x="0" y="0"/>
+          <a:chExt cx="0" cy="0"/>
+        </a:xfrm>
+      </p:grpSpPr>
+      <p:sp>
+        <p:nvSpPr>
+          <p:cNvPr id="7" name="CuadroTexto 6">
+            <a:extLst>
+              <a:ext uri="{FF2B5EF4-FFF2-40B4-BE49-F238E27FC236}">
+                <a16:creationId xmlns:a16="http://schemas.microsoft.com/office/drawing/2014/main" id="{4EC81451-69F4-5FF6-96C1-40C07E1604C9}"/>
+              </a:ext>
+            </a:extLst>
+          </p:cNvPr>
+          <p:cNvSpPr txBox="1"/>
+          <p:nvPr/>
+        </p:nvSpPr>
+        <p:spPr>
+          <a:xfrm>
+            <a:off x="908175" y="152426"/>
+            <a:ext cx="7254625" cy="369332"/>
+          </a:xfrm>
+          <a:prstGeom prst="rect">
+            <a:avLst/>
+          </a:prstGeom>
+          <a:noFill/>
+        </p:spPr>
+        <p:txBody>
+          <a:bodyPr wrap="square">
+            <a:spAutoFit/>
+          </a:bodyPr>
+          <a:lstStyle/>
+          <a:p>
+            <a:pPr algn="ctr">
+              <a:buNone/>
+            </a:pPr>
+            <a:r>
+              <a:rPr lang="es-MX" sz="1800" b="1" i="0" dirty="0">
+                <a:solidFill>
+                  <a:srgbClr val="000000"/>
+                </a:solidFill>
+                <a:effectLst/>
+                <a:latin typeface="Montserrat" pitchFamily="2" charset="0"/>
+              </a:rPr>
+              <a:t>Detalle de Notas en primeras planas</a:t>
+            </a:r>
+          </a:p>
+        </p:txBody>
+      </p:sp>
+      <p:pic>
+        <p:nvPicPr>
+          <p:cNvPr id="4" name="Imagen 3">
+            <a:extLst>
+              <a:ext uri="{FF2B5EF4-FFF2-40B4-BE49-F238E27FC236}">
+                <a16:creationId xmlns:a16="http://schemas.microsoft.com/office/drawing/2014/main" id="{6AE98DDE-6848-4C22-B74D-719F0605E673}"/>
+              </a:ext>
+            </a:extLst>
+          </p:cNvPr>
+          <p:cNvPicPr>
+            <a:picLocks noChangeAspect="1"/>
+          </p:cNvPicPr>
+          <p:nvPr/>
+        </p:nvPicPr>
+        <p:blipFill>
+          <a:blip r:embed="rId2"/>
+          <a:stretch>
+            <a:fillRect/>
+          </a:stretch>
+        </p:blipFill>
+        <p:spPr>
+          <a:xfrm>
+            <a:off x="1766043" y="1258465"/>
+            <a:ext cx="5538890" cy="2769446"/>
+          </a:xfrm>
+          <a:prstGeom prst="rect">
+            <a:avLst/>
+          </a:prstGeom>
+        </p:spPr>
+      </p:pic>
+    </p:spTree>
+    <p:extLst>
+      <p:ext uri="{BB962C8B-B14F-4D97-AF65-F5344CB8AC3E}">
+        <p14:creationId xmlns:p14="http://schemas.microsoft.com/office/powerpoint/2010/main" val="1400773918"/>
       </p:ext>
     </p:extLst>
   </p:cSld>
